--- a/slides/decks/s24-mpn.pptx
+++ b/slides/decks/s24-mpn.pptx
@@ -135,13 +135,13 @@
   <p:extLst>
     <p:ext uri="{521415D9-36F7-43E2-AB2F-B90AF26B5E84}">
       <p14:sectionLst xmlns:p14="http://schemas.microsoft.com/office/powerpoint/2010/main">
-        <p14:section name="Opening" id="{07d7c34f-ce5d-6682-7d5f-f9e73a49d330}">
+        <p14:section name="Opening" id="{ebc8bced-920a-aff3-858a-3c71aef635c8}">
           <p14:sldIdLst>
             <p14:sldId id="256"/>
             <p14:sldId id="257"/>
           </p14:sldIdLst>
         </p14:section>
-        <p14:section name="Myelofibrosis" id="{a23366c3-8144-ac86-24ab-087de1ca2d95}">
+        <p14:section name="Myelofibrosis" id="{e8a3a929-22d7-244f-7ca9-bfd7bcdef4fd}">
           <p14:sldIdLst>
             <p14:sldId id="258"/>
             <p14:sldId id="259"/>
@@ -152,7 +152,7 @@
             <p14:sldId id="264"/>
           </p14:sldIdLst>
         </p14:section>
-        <p14:section name="CML" id="{1722d24f-e060-0e89-3c37-8e08d7db7947}">
+        <p14:section name="CML" id="{c72eaaf5-be3a-7aa6-0a4b-541db6429e5f}">
           <p14:sldIdLst>
             <p14:sldId id="265"/>
             <p14:sldId id="266"/>
@@ -163,7 +163,7 @@
             <p14:sldId id="271"/>
           </p14:sldIdLst>
         </p14:section>
-        <p14:section name="Questions" id="{237dfc48-4411-6409-cb95-575540628118}">
+        <p14:section name="Questions" id="{a622652f-ff92-a57a-761d-60e80b18e531}">
           <p14:sldIdLst>
             <p14:sldId id="272"/>
             <p14:sldId id="273"/>
@@ -173,7 +173,7 @@
             <p14:sldId id="277"/>
           </p14:sldIdLst>
         </p14:section>
-        <p14:section name="References" id="{11633a06-74f4-de38-fb2d-3253e5ceafc2}">
+        <p14:section name="References" id="{377c8bea-40c5-959d-bd27-4440cb58cb9e}">
           <p14:sldIdLst>
             <p14:sldId id="278"/>
             <p14:sldId id="279"/>
@@ -181,7 +181,7 @@
             <p14:sldId id="281"/>
           </p14:sldIdLst>
         </p14:section>
-        <p14:section name="Backup" id="{3a9d62c4-7f87-dc3a-869c-b85f1915115b}">
+        <p14:section name="Backup" id="{13c3bb3d-65a2-4211-6bbb-b7eb685ef70c}">
           <p14:sldIdLst>
             <p14:sldId id="282"/>
             <p14:sldId id="283"/>
@@ -754,6 +754,17 @@
               </a:spcAft>
             </a:pPr>
             <a:r>
+              <a:rPr lang="en-US" dirty="0"/>
+              <a:t>這個分數的價值在於五個因子都在移植前就知道，可以在門診直接算給病人聽。第 11 章也提醒，所有這類模型的預測能力都有限，Gratwohl score 的預測值大約 0.63，所以它是討論的起點，不是唯一的決定依據。</a:t>
+            </a:r>
+          </a:p>
+          <a:p>
+            <a:pPr>
+              <a:spcAft>
+                <a:spcPts val="600"/>
+              </a:spcAft>
+            </a:pPr>
+            <a:r>
               <a:rPr lang="en-US" b="1" dirty="0"/>
               <a:t>講者提醒（不念出來）：</a:t>
             </a:r>
@@ -912,6 +923,17 @@
               </a:spcAft>
             </a:pPr>
             <a:r>
+              <a:rPr lang="en-US" dirty="0"/>
+              <a:t>所以分數依然有用，但高分病人現在的結果比過去好得多。</a:t>
+            </a:r>
+          </a:p>
+          <a:p>
+            <a:pPr>
+              <a:spcAft>
+                <a:spcPts val="600"/>
+              </a:spcAft>
+            </a:pPr>
+            <a:r>
               <a:rPr lang="en-US" b="1" dirty="0"/>
               <a:t>講者提醒（不念出來）：</a:t>
             </a:r>
@@ -1052,6 +1074,17 @@
               <a:t>EBMT 在第三代 TKI 時代的分析發現，移植前用過幾種 TKI 不影響結果，disease phase 和 performance status 才有影響。所以照顧 CML 的醫師要密切追蹤，一出現 molecular progression 就送移植，不要等到 AP、BC 或已經回到 CP2 才送。Blast crisis 的病人則要先用 TKI 或化療回到第二個 CP 再移植。</a:t>
             </a:r>
           </a:p>
+          <a:p>
+            <a:pPr>
+              <a:spcAft>
+                <a:spcPts val="600"/>
+              </a:spcAft>
+            </a:pPr>
+            <a:r>
+              <a:rPr lang="en-US" dirty="0"/>
+              <a:t>這張表也解釋了為什麼現在 CML 移植的整體結果看起來沒有想像中好，因為進來的病人組成變差了。病人在 TKI 治療下出現 molecular progression，就是該轉介移植評估的訊號。</a:t>
+            </a:r>
+          </a:p>
         </p:txBody>
       </p:sp>
       <p:sp>
@@ -1177,6 +1210,17 @@
               <a:t>TKI 為什麼治不好？因為 quiescent 的白血病幹細胞不依賴 BCR-ABL signaling，TKI 打不到。RQ-PCR 在 3 個月和 6 個月看 BCR-ABL 下降速度，可以在第一年內找出日後需要移植的人。Autologous HCT 目前不建議，EBMT 每年只剩 0 到 1 例。</a:t>
             </a:r>
           </a:p>
+          <a:p>
+            <a:pPr>
+              <a:spcAft>
+                <a:spcPts val="600"/>
+              </a:spcAft>
+            </a:pPr>
+            <a:r>
+              <a:rPr lang="en-US" dirty="0"/>
+              <a:t>這張表和移植的關係在最下面一列。BCR-ABL 在 3 個月、6 個月下降不夠快的病人，長期對 TKI 的反應通常不好，就可以在第一年內、還在 chronic phase 的時候，冷靜地規劃移植，而不是等到 blast crisis 再緊急送。</a:t>
+            </a:r>
+          </a:p>
         </p:txBody>
       </p:sp>
       <p:sp>
@@ -1302,6 +1346,17 @@
               <a:t>最右邊是灰色地帶。第一線用第二代 TKI 的病人失敗了，可以換另一個第二代、第三代或 asciminib，到底要馬上移植，還是等下一次失敗，書上說仍有爭議。所以選擇題如果出現第二線失敗，通常不會是唯一正確答案；T315I 或第三線以後失敗才是明確的移植適應症。AP 的處理要個別化，但不能拖。</a:t>
             </a:r>
           </a:p>
+          <a:p>
+            <a:pPr>
+              <a:spcAft>
+                <a:spcPts val="600"/>
+              </a:spcAft>
+            </a:pPr>
+            <a:r>
+              <a:rPr lang="en-US" dirty="0"/>
+              <a:t>Blast crisis 的病人移植前一定要先回到 chronic phase，直接在 BC 移植的結果非常差。CP1 的移植結果比其他所有狀況都好，所以目標是讓需要移植的人在 CP1 就完成移植。</a:t>
+            </a:r>
+          </a:p>
         </p:txBody>
       </p:sp>
       <p:sp>
@@ -1438,6 +1493,17 @@
               <a:t>PTCy 讓 haplo 和 mismatched unrelated donor 也可行。EBMT 的 CML 資料，haplo 的 OS 和 MUD 相近，RFS 稍低，但和 matched related 比沒有差。MUD 或 MMUD 用 PTCy 和傳統 CNI 加 MTX 相比，OS、RFS、復發和 NRM 都沒有差別。</a:t>
             </a:r>
           </a:p>
+          <a:p>
+            <a:pPr>
+              <a:spcAft>
+                <a:spcPts val="600"/>
+              </a:spcAft>
+            </a:pPr>
+            <a:r>
+              <a:rPr lang="en-US" dirty="0"/>
+              <a:t>在病房上的應用是這樣：一個年輕、CP 的 CML 病人，有 matched sibling，標準做法就是 MAC 加 CSA 和 MTX，不需要刻意選 RIC。年紀大、comorbidity 多，才改用 FLU 為主的 RIC，並且接受較高的復發風險，移植後更要密切追 BCR-ABL1。</a:t>
+            </a:r>
+          </a:p>
         </p:txBody>
       </p:sp>
       <p:sp>
@@ -1574,6 +1640,17 @@
               <a:t>TKI 和 DLI 可以合併，但先後順序還沒有定論。EBMT 431 位只有 42% 達到某種緩解，可能因為一半以上原本就在 advanced phase 移植。預防性 TKI maintenance 在 CIBMTR 資料沒有好處。</a:t>
             </a:r>
           </a:p>
+          <a:p>
+            <a:pPr>
+              <a:spcAft>
+                <a:spcPts val="600"/>
+              </a:spcAft>
+            </a:pPr>
+            <a:r>
+              <a:rPr lang="en-US" dirty="0"/>
+              <a:t>這也是 CML 和其他疾病不同的地方，有一個敏感、可定量的 marker，可以在血液學復發前好幾個月就介入，DLI 的效果也最好。</a:t>
+            </a:r>
+          </a:p>
         </p:txBody>
       </p:sp>
       <p:sp>
@@ -1956,6 +2033,17 @@
               </a:spcAft>
             </a:pPr>
             <a:r>
+              <a:rPr lang="en-US" dirty="0"/>
+              <a:t>選項 A 換 nilotinib 再追三個月，B 加量 dasatinib 並延後 HLA typing，C 是 ponatinib 或 asciminib、現在就找 donor、取得新反應後移植，D 是直接移植不再用 TKI，E 是 autologous HCT。</a:t>
+            </a:r>
+          </a:p>
+          <a:p>
+            <a:pPr>
+              <a:spcAft>
+                <a:spcPts val="600"/>
+              </a:spcAft>
+            </a:pPr>
+            <a:r>
               <a:rPr lang="en-US" b="1" dirty="0"/>
               <a:t>[Pause for answers.]</a:t>
             </a:r>
@@ -2085,6 +2173,17 @@
               <a:t>最後三題 board-style 題目，前兩段各至少對應一題。</a:t>
             </a:r>
           </a:p>
+          <a:p>
+            <a:pPr>
+              <a:spcAft>
+                <a:spcPts val="600"/>
+              </a:spcAft>
+            </a:pPr>
+            <a:r>
+              <a:rPr lang="en-US" dirty="0"/>
+              <a:t>每一段都照同一個順序走，先看疾病本身的風險，再看移植本身的風險，最後才談時機和移植後的監測。</a:t>
+            </a:r>
+          </a:p>
         </p:txBody>
       </p:sp>
       <p:sp>
@@ -2331,6 +2430,17 @@
               </a:spcAft>
             </a:pPr>
             <a:r>
+              <a:rPr lang="en-US" dirty="0"/>
+              <a:t>注意幾個細節：移植已經超過 4 個月，三次檢體間隔各約 4 週，數值持續上升。選項 A 是第一年都觀察，B 是 molecular relapse、給逐步加量的 DLI，可以合併 TKI，C 是第二次移植，D 是一次給大劑量 DLI，E 是等 cytogenetic relapse 再處理。</a:t>
+            </a:r>
+          </a:p>
+          <a:p>
+            <a:pPr>
+              <a:spcAft>
+                <a:spcPts val="600"/>
+              </a:spcAft>
+            </a:pPr>
+            <a:r>
               <a:rPr lang="en-US" b="1" dirty="0"/>
               <a:t>[Pause for answers.]</a:t>
             </a:r>
@@ -3212,6 +3322,17 @@
               <a:t>DIPSS 的 D 是 dynamic，病程中任何時間都可以重算，所以適合在追蹤時決定什麼時候該轉介移植。書上附了 DIPSS 和 DIPSS-plus 的線上計算器連結，臨床直接用就好。</a:t>
             </a:r>
           </a:p>
+          <a:p>
+            <a:pPr>
+              <a:spcAft>
+                <a:spcPts val="600"/>
+              </a:spcAft>
+            </a:pPr>
+            <a:r>
+              <a:rPr lang="en-US" dirty="0"/>
+              <a:t>考題常給一組數字要你算分。記得 IPSS 只用在診斷時，DIPSS 可以在追蹤中任何時間用，兩者差 1 分就可能跨過 intermediate-2 的門檻。</a:t>
+            </a:r>
+          </a:p>
         </p:txBody>
       </p:sp>
       <p:sp>
@@ -3344,6 +3465,17 @@
               </a:spcAft>
             </a:pPr>
             <a:r>
+              <a:rPr lang="en-US" dirty="0"/>
+              <a:t>臨床上的用法是這樣：DIPSS 落在 intermediate-1 的病人，再用 DIPSS-plus 或 MIPSS70 看有沒有隱藏的高風險，例如輸血依賴、不良 karyotype 或 ASXL1，這正好接到下一張的適應症。</a:t>
+            </a:r>
+          </a:p>
+          <a:p>
+            <a:pPr>
+              <a:spcAft>
+                <a:spcPts val="600"/>
+              </a:spcAft>
+            </a:pPr>
+            <a:r>
               <a:rPr lang="en-US" b="1" dirty="0"/>
               <a:t>講者提醒（不念出來）：</a:t>
             </a:r>
@@ -3484,6 +3616,28 @@
               <a:t>適應症成立之後，還要用移植專用的 MTSS 評估移植本身的風險。病人本身的因素裡年紀最重要，comorbidity 和 geriatric assessment 也會影響結果，但還沒有在 myelofibrosis 專門研究過。考題若給 72 歲的病人，要想到 70 歲這個上限。</a:t>
             </a:r>
           </a:p>
+          <a:p>
+            <a:pPr>
+              <a:spcAft>
+                <a:spcPts val="600"/>
+              </a:spcAft>
+            </a:pPr>
+            <a:r>
+              <a:rPr lang="en-US" dirty="0"/>
+              <a:t>實務上，病人一被歸到 intermediate-2 或 high，就該開始 HLA typing 和找 donor，因為從決定到真正移植通常要好幾個月。Intermediate-1 的病人則要定期重算 DIPSS，並且送 NGS 看 ASXL1 等突變，分數一升高就轉介。</a:t>
+            </a:r>
+          </a:p>
+          <a:p>
+            <a:pPr>
+              <a:spcAft>
+                <a:spcPts val="600"/>
+              </a:spcAft>
+            </a:pPr>
+            <a:r>
+              <a:rPr lang="en-US" dirty="0"/>
+              <a:t>PV 和 ET 只有在轉成 myelofibrosis 或 AML 之後，才進入這張圖的流程。</a:t>
+            </a:r>
+          </a:p>
         </p:txBody>
       </p:sp>
       <p:sp>
@@ -3616,6 +3770,17 @@
               </a:spcAft>
             </a:pPr>
             <a:r>
+              <a:rPr lang="en-US" dirty="0"/>
+              <a:t>所以一個 DIPSS high 的病人，如果 MTSS 也是 very high，NRM 可能超過一半，這時候就要很仔細地和病人討論移植的利弊；反過來 MTSS low 的病人，移植的 5 年存活可以到九成左右。疾病分數決定要不要移植，MTSS 幫忙估計移植要付出的代價。</a:t>
+            </a:r>
+          </a:p>
+          <a:p>
+            <a:pPr>
+              <a:spcAft>
+                <a:spcPts val="600"/>
+              </a:spcAft>
+            </a:pPr>
+            <a:r>
               <a:rPr lang="en-US" b="1" dirty="0"/>
               <a:t>講者提醒（不念出來）：</a:t>
             </a:r>
@@ -3767,6 +3932,28 @@
               <a:t>Conditioning 強度則沒有 prospective 比較，回溯性資料 MAC 和 RIC 結果相近。因為病人年紀偏大，RIC 占 EBMT 登錄的 myelofibrosis 移植大約三分之二。Accelerated phase 的移植結果和 chronic phase 差不多，blast phase 就明顯較差，所以別等到轉成 blast phase 才送。</a:t>
             </a:r>
           </a:p>
+          <a:p>
+            <a:pPr>
+              <a:spcAft>
+                <a:spcPts val="600"/>
+              </a:spcAft>
+            </a:pPr>
+            <a:r>
+              <a:rPr lang="en-US" dirty="0"/>
+              <a:t>這些資料放在一起看，可以得到一個實用的順序，和書上 Figure 77.1 一致：先找 matched sibling，再找 matched unrelated，最後才是 mismatched unrelated、haplo 或 cord。Conditioning 則依年紀、疾病狀態和 comorbidity 選，強度本身不是決定結果的主要因素。</a:t>
+            </a:r>
+          </a:p>
+          <a:p>
+            <a:pPr>
+              <a:spcAft>
+                <a:spcPts val="600"/>
+              </a:spcAft>
+            </a:pPr>
+            <a:r>
+              <a:rPr lang="en-US" dirty="0"/>
+              <a:t>另外 high molecular 或 cytogenetic risk 的病人，提高 conditioning 強度也沒有好處，這是 Gagelmann 2022 的國際合作分析。</a:t>
+            </a:r>
+          </a:p>
         </p:txBody>
       </p:sp>
       <p:sp>
@@ -3903,6 +4090,28 @@
               <a:t>脾臟非常大時可以考慮 splenectomy，脾臟放射則只有個案報告。書上的 Figure 77.1 也把 iron chelation 列為移植前的準備。</a:t>
             </a:r>
           </a:p>
+          <a:p>
+            <a:pPr>
+              <a:spcAft>
+                <a:spcPts val="600"/>
+              </a:spcAft>
+            </a:pPr>
+            <a:r>
+              <a:rPr lang="en-US" dirty="0"/>
+              <a:t>為什麼要強調慢慢減量？突然停 ruxolitinib 可能出現症狀反彈和脾臟快速變大，剛好發生在 conditioning 期間，會讓病人狀況變差。所以要和移植團隊事先排好減量的時間表，讓停藥和 conditioning 銜接起來。</a:t>
+            </a:r>
+          </a:p>
+          <a:p>
+            <a:pPr>
+              <a:spcAft>
+                <a:spcPts val="600"/>
+              </a:spcAft>
+            </a:pPr>
+            <a:r>
+              <a:rPr lang="en-US" dirty="0"/>
+              <a:t>Ruxolitinib 在這裡的角色是讓病人以比較好的狀態進入移植，症狀改善、脾臟縮小、體能變好，Karnofsky 也可能跟著改善，而 Karnofsky 本身就是 MTSS 的一項。</a:t>
+            </a:r>
+          </a:p>
         </p:txBody>
       </p:sp>
       <p:sp>
@@ -4026,6 +4235,28 @@
             <a:r>
               <a:rPr lang="en-US" dirty="0"/>
               <a:t>骨髓纖維化在移植後消退得很快，day 100 大約 60% 達到完全或接近完全消退，day 180 增加到 90%。纖維化消得越快，長期結果越好，這也說明 fibrosis 是一個動態的過程。</a:t>
+            </a:r>
+          </a:p>
+          <a:p>
+            <a:pPr>
+              <a:spcAft>
+                <a:spcPts val="600"/>
+              </a:spcAft>
+            </a:pPr>
+            <a:r>
+              <a:rPr lang="en-US" dirty="0"/>
+              <a:t>實務上，移植前就要知道病人帶哪一個 driver，移植後才有 marker 可追。三陰性的病人大約占一成，就只能靠 chimerism 和骨髓來追。</a:t>
+            </a:r>
+          </a:p>
+          <a:p>
+            <a:pPr>
+              <a:spcAft>
+                <a:spcPts val="600"/>
+              </a:spcAft>
+            </a:pPr>
+            <a:r>
+              <a:rPr lang="en-US" dirty="0"/>
+              <a:t>DLI 在 myelofibrosis 有效，本身就是 graft-versus-myelofibrosis effect 的證據。最早的報告是移植失敗後給 DLI 仍能誘導緩解。</a:t>
             </a:r>
           </a:p>
         </p:txBody>
@@ -6471,7 +6702,7 @@
         </p:nvSpPr>
         <p:spPr>
           <a:xfrm>
-            <a:off x="685800" y="4846320"/>
+            <a:off x="685800" y="5074920"/>
             <a:ext cx="10817352" cy="411480"/>
           </a:xfrm>
           <a:prstGeom prst="rect">
@@ -8008,7 +8239,7 @@
         </p:nvSpPr>
         <p:spPr>
           <a:xfrm>
-            <a:off x="685800" y="4206240"/>
+            <a:off x="685800" y="4343400"/>
             <a:ext cx="10817352" cy="411480"/>
           </a:xfrm>
           <a:prstGeom prst="rect">
@@ -15780,7 +16011,7 @@
                   <a:schemeClr val="tx1"/>
                 </a:solidFill>
               </a:rPr>
-              <a:t>BACKUP · BACKUP · MYELOFIBROSIS TRIALS</a:t>
+              <a:t>BACKUP · MYELOFIBROSIS TRIALS</a:t>
             </a:r>
             <a:endParaRPr lang="en-US" sz="1100" dirty="0"/>
           </a:p>
@@ -16815,7 +17046,7 @@
                   <a:schemeClr val="tx1"/>
                 </a:solidFill>
               </a:rPr>
-              <a:t>BACKUP · BACKUP · MYELOFIBROSIS PATHWAY</a:t>
+              <a:t>BACKUP · MYELOFIBROSIS PATHWAY</a:t>
             </a:r>
             <a:endParaRPr lang="en-US" sz="1100" dirty="0"/>
           </a:p>
@@ -17059,7 +17290,7 @@
                   <a:schemeClr val="tx1"/>
                 </a:solidFill>
               </a:rPr>
-              <a:t>BACKUP · BACKUP · CML HISTORY AND T-CELL DEPLETION</a:t>
+              <a:t>BACKUP · CML HISTORY AND T-CELL DEPLETION</a:t>
             </a:r>
             <a:endParaRPr lang="en-US" sz="1100" dirty="0"/>
           </a:p>

--- a/slides/decks/s24-mpn.pptx
+++ b/slides/decks/s24-mpn.pptx
@@ -135,13 +135,13 @@
   <p:extLst>
     <p:ext uri="{521415D9-36F7-43E2-AB2F-B90AF26B5E84}">
       <p14:sectionLst xmlns:p14="http://schemas.microsoft.com/office/powerpoint/2010/main">
-        <p14:section name="Opening" id="{ebc8bced-920a-aff3-858a-3c71aef635c8}">
+        <p14:section name="Opening" id="{3909d05a-12aa-d153-b84b-e783dd3774d8}">
           <p14:sldIdLst>
             <p14:sldId id="256"/>
             <p14:sldId id="257"/>
           </p14:sldIdLst>
         </p14:section>
-        <p14:section name="Myelofibrosis" id="{e8a3a929-22d7-244f-7ca9-bfd7bcdef4fd}">
+        <p14:section name="Myelofibrosis" id="{cc4b1534-8349-0195-362a-f9a9f0e39cba}">
           <p14:sldIdLst>
             <p14:sldId id="258"/>
             <p14:sldId id="259"/>
@@ -152,7 +152,7 @@
             <p14:sldId id="264"/>
           </p14:sldIdLst>
         </p14:section>
-        <p14:section name="CML" id="{c72eaaf5-be3a-7aa6-0a4b-541db6429e5f}">
+        <p14:section name="CML" id="{5772d766-0f2b-b1c8-0e66-7daabd921024}">
           <p14:sldIdLst>
             <p14:sldId id="265"/>
             <p14:sldId id="266"/>
@@ -163,7 +163,7 @@
             <p14:sldId id="271"/>
           </p14:sldIdLst>
         </p14:section>
-        <p14:section name="Questions" id="{a622652f-ff92-a57a-761d-60e80b18e531}">
+        <p14:section name="Questions" id="{efc3480a-483c-7f62-aeb4-24e990814b36}">
           <p14:sldIdLst>
             <p14:sldId id="272"/>
             <p14:sldId id="273"/>
@@ -173,7 +173,7 @@
             <p14:sldId id="277"/>
           </p14:sldIdLst>
         </p14:section>
-        <p14:section name="References" id="{377c8bea-40c5-959d-bd27-4440cb58cb9e}">
+        <p14:section name="References" id="{cf630f7b-6222-0b72-2e0d-e0f86ffaa391}">
           <p14:sldIdLst>
             <p14:sldId id="278"/>
             <p14:sldId id="279"/>
@@ -181,7 +181,7 @@
             <p14:sldId id="281"/>
           </p14:sldIdLst>
         </p14:section>
-        <p14:section name="Backup" id="{13c3bb3d-65a2-4211-6bbb-b7eb685ef70c}">
+        <p14:section name="Backup" id="{91f2d1e7-9f28-f122-497b-8161bc7ec826}">
           <p14:sldIdLst>
             <p14:sldId id="282"/>
             <p14:sldId id="283"/>
@@ -1185,7 +1185,7 @@
             </a:pPr>
             <a:r>
               <a:rPr lang="en-US" dirty="0"/>
-              <a:t>TKI 出現之後，移植從 CML 的首選退到第二、第三甚至第四線。Imatinib 讓大約 60% 的病人長期控制良好，少數人甚至可以停藥。Imatinib 失敗的病人，大約一半可以在第二代或第三代 TKI 重新取得緩解。</a:t>
+              <a:t>TKI 出現之後，移植從 CML 的首選退到第二、第三甚至第四線。Imatinib 讓大約 60% 的病人長期控制良好，少數人甚至可以停藥。沒有達到長期控制的病人，大約一半可以在第二代、第三代 TKI 或 asciminib 重新取得緩解。</a:t>
             </a:r>
           </a:p>
           <a:p>
@@ -1207,7 +1207,7 @@
             </a:pPr>
             <a:r>
               <a:rPr lang="en-US" dirty="0"/>
-              <a:t>TKI 為什麼治不好？因為 quiescent 的白血病幹細胞不依賴 BCR-ABL signaling，TKI 打不到。RQ-PCR 在 3 個月和 6 個月看 BCR-ABL 下降速度，可以在第一年內找出日後需要移植的人。Autologous HCT 目前不建議，EBMT 每年只剩 0 到 1 例。</a:t>
+              <a:t>TKI 治不好 CML 的原因在 quiescent 的白血病幹細胞，它們不依賴 BCR-ABL signaling，TKI 打不到。RQ-PCR 在 3 個月和 6 個月看 BCR-ABL 下降速度，可以在第一年內找出日後需要移植的人。Autologous HCT 目前不建議，EBMT 每年只剩 0 到 1 例。</a:t>
             </a:r>
           </a:p>
           <a:p>
@@ -1479,7 +1479,7 @@
             </a:pPr>
             <a:r>
               <a:rPr lang="en-US" dirty="0"/>
-              <a:t>GVHD prophylaxis 的標準仍是 CSA 加 short-course MTX。1980 年代用 T-cell depletion 降低 GVHD，但復發增加，很多中心就放棄了，CML 是最早證明 graft-versus-leukaemia effect 的疾病之一。</a:t>
+              <a:t>GVHD prophylaxis 的標準仍是 CSA 加 short-course MTX。1980 年代用 T-cell depletion 降低 GVHD，但復發增加，很多中心就放棄了。</a:t>
             </a:r>
           </a:p>
           <a:p>
@@ -1490,7 +1490,7 @@
             </a:pPr>
             <a:r>
               <a:rPr lang="en-US" dirty="0"/>
-              <a:t>PTCy 讓 haplo 和 mismatched unrelated donor 也可行。EBMT 的 CML 資料，haplo 的 OS 和 MUD 相近，RFS 稍低，但和 matched related 比沒有差。MUD 或 MMUD 用 PTCy 和傳統 CNI 加 MTX 相比，OS、RFS、復發和 NRM 都沒有差別。</a:t>
+              <a:t>PTCy 讓 haplo 和 mismatched unrelated donor 也可行。EBMT 的 CML 資料，haplo 的 OS 和 MUD 相近，RFS 稍低，但和 matched related 比沒有差。MUD 或 MMUD 用 PTCy 和傳統 CNI 加 MTX 相比，OS、RFS、復發和 NRM 都沒有差別。所以 donor 不是 matched sibling 時，PTCy 已經是可以接受的選擇，不必因為缺少 matched donor 而延後移植。</a:t>
             </a:r>
           </a:p>
           <a:p>
@@ -1648,6 +1648,17 @@
             </a:pPr>
             <a:r>
               <a:rPr lang="en-US" dirty="0"/>
+              <a:t>逐步加量的概念來自 Mackinnon 1995，從低劑量開始，沒有反應再往上加，讓 graft-versus-leukaemia 和 GVHD 在一定程度上分開。</a:t>
+            </a:r>
+          </a:p>
+          <a:p>
+            <a:pPr>
+              <a:spcAft>
+                <a:spcPts val="600"/>
+              </a:spcAft>
+            </a:pPr>
+            <a:r>
+              <a:rPr lang="en-US" dirty="0"/>
               <a:t>這也是 CML 和其他疾病不同的地方，有一個敏感、可定量的 marker，可以在血液學復發前好幾個月就介入，DLI 的效果也最好。</a:t>
             </a:r>
           </a:p>
@@ -1912,6 +1923,17 @@
               <a:t>E 也不對，myelofibrosis 只有 allo-HCT 能治癒，脾臟處理只是移植前的輔助。脾臟對 ruxolitinib 沒反應又非常大，才考慮 splenectomy 或脾臟放射。</a:t>
             </a:r>
           </a:p>
+          <a:p>
+            <a:pPr>
+              <a:spcAft>
+                <a:spcPts val="600"/>
+              </a:spcAft>
+            </a:pPr>
+            <a:r>
+              <a:rPr lang="en-US" dirty="0"/>
+              <a:t>如果把題目的年紀改成 72 歲，DIPSS 一樣是 4 分，但已超過 70 歲的建議上限。</a:t>
+            </a:r>
+          </a:p>
         </p:txBody>
       </p:sp>
       <p:sp>
@@ -2306,7 +2328,18 @@
             </a:pPr>
             <a:r>
               <a:rPr lang="en-US" dirty="0"/>
-              <a:t>記住 phase 才是決定移植結果的因素，前面用過幾種 TKI 反而不影響，所以重點是讓病人在進入 BC 之前完成移植。</a:t>
+              <a:t>Phase 才是決定移植結果的因素，前面用過幾種 TKI 反而不影響，所以重點是讓病人在進入 BC 之前完成移植。</a:t>
+            </a:r>
+          </a:p>
+          <a:p>
+            <a:pPr>
+              <a:spcAft>
+                <a:spcPts val="600"/>
+              </a:spcAft>
+            </a:pPr>
+            <a:r>
+              <a:rPr lang="en-US" dirty="0"/>
+              <a:t>AP 的處理要個別化，但 donor search 和轉介要快，因為這類病人不移植的結果不好。</a:t>
             </a:r>
           </a:p>
         </p:txBody>
@@ -2420,17 +2453,6 @@
             </a:pPr>
             <a:r>
               <a:rPr lang="en-US" dirty="0"/>
-              <a:t>先對照三條 molecular relapse 的定義，再決定介入的方式。</a:t>
-            </a:r>
-          </a:p>
-          <a:p>
-            <a:pPr>
-              <a:spcAft>
-                <a:spcPts val="600"/>
-              </a:spcAft>
-            </a:pPr>
-            <a:r>
-              <a:rPr lang="en-US" dirty="0"/>
               <a:t>注意幾個細節：移植已經超過 4 個月，三次檢體間隔各約 4 週，數值持續上升。選項 A 是第一年都觀察，B 是 molecular relapse、給逐步加量的 DLI，可以合併 TKI，C 是第二次移植，D 是一次給大劑量 DLI，E 是等 cytogenetic relapse 再處理。</a:t>
             </a:r>
           </a:p>
@@ -2570,6 +2592,17 @@
               <a:t>CP 復發的 DLI 有 60 到 90% 能再緩解。D 錯在一次給大劑量，逐步加量才能降低 GVHD，而 DLI 後的 GVHD 會讓死亡風險增加 2.3 倍。TKI 可以合併，順序沒有定論。</a:t>
             </a:r>
           </a:p>
+          <a:p>
+            <a:pPr>
+              <a:spcAft>
+                <a:spcPts val="600"/>
+              </a:spcAft>
+            </a:pPr>
+            <a:r>
+              <a:rPr lang="en-US" dirty="0"/>
+              <a:t>如果移植後才 2 個月就看到 0.03%，那不符合定義，可以繼續追蹤。</a:t>
+            </a:r>
+          </a:p>
         </p:txBody>
       </p:sp>
       <p:sp>
@@ -3951,7 +3984,7 @@
             </a:pPr>
             <a:r>
               <a:rPr lang="en-US" dirty="0"/>
-              <a:t>另外 high molecular 或 cytogenetic risk 的病人，提高 conditioning 強度也沒有好處，這是 Gagelmann 2022 的國際合作分析。</a:t>
+              <a:t>EBMT 登錄裡 RIC 用得多，是因為毒性較低、病人年紀較大，不是因為療效比較好。</a:t>
             </a:r>
           </a:p>
         </p:txBody>
@@ -4098,7 +4131,7 @@
             </a:pPr>
             <a:r>
               <a:rPr lang="en-US" dirty="0"/>
-              <a:t>為什麼要強調慢慢減量？突然停 ruxolitinib 可能出現症狀反彈和脾臟快速變大，剛好發生在 conditioning 期間，會讓病人狀況變差。所以要和移植團隊事先排好減量的時間表，讓停藥和 conditioning 銜接起來。</a:t>
+              <a:t>突然停 ruxolitinib 會出現 rebound phenomenon，如果剛好發生在 conditioning 期間，病人的狀況會變差。所以要和移植團隊事先排好減量的時間表，讓停藥和 conditioning 銜接起來。</a:t>
             </a:r>
           </a:p>
           <a:p>
@@ -4245,7 +4278,7 @@
             </a:pPr>
             <a:r>
               <a:rPr lang="en-US" dirty="0"/>
-              <a:t>實務上，移植前就要知道病人帶哪一個 driver，移植後才有 marker 可追。三陰性的病人大約占一成，就只能靠 chimerism 和骨髓來追。</a:t>
+              <a:t>實務上，移植前就要知道病人帶哪一個 driver，移植後才有 marker 可追。反過來算，大約一成的病人沒有這三個 marker 可以追。</a:t>
             </a:r>
           </a:p>
           <a:p>
@@ -10232,7 +10265,7 @@
                   <a:schemeClr val="tx1"/>
                 </a:solidFill>
               </a:rPr>
-              <a:t>2nd-line failure or intolerance</a:t>
+              <a:t>First-line 2nd-gen TKI fails</a:t>
             </a:r>
             <a:endParaRPr lang="en-US" sz="1500" dirty="0"/>
           </a:p>
@@ -10298,7 +10331,7 @@
                   <a:schemeClr val="tx1"/>
                 </a:solidFill>
               </a:rPr>
-              <a:t>Debated: switch TKI or transplant</a:t>
+              <a:t>Debated: next TKI or HCT</a:t>
             </a:r>
             <a:endParaRPr lang="en-US" sz="1400" dirty="0"/>
           </a:p>

--- a/slides/decks/s24-mpn.pptx
+++ b/slides/decks/s24-mpn.pptx
@@ -135,13 +135,13 @@
   <p:extLst>
     <p:ext uri="{521415D9-36F7-43E2-AB2F-B90AF26B5E84}">
       <p14:sectionLst xmlns:p14="http://schemas.microsoft.com/office/powerpoint/2010/main">
-        <p14:section name="Opening" id="{3909d05a-12aa-d153-b84b-e783dd3774d8}">
+        <p14:section name="Opening" id="{ffad76ee-a410-aedc-e3be-7ec9acd04c19}">
           <p14:sldIdLst>
             <p14:sldId id="256"/>
             <p14:sldId id="257"/>
           </p14:sldIdLst>
         </p14:section>
-        <p14:section name="Myelofibrosis" id="{cc4b1534-8349-0195-362a-f9a9f0e39cba}">
+        <p14:section name="Myelofibrosis" id="{b212ff49-340e-815a-fc4c-4d86ca7a84c6}">
           <p14:sldIdLst>
             <p14:sldId id="258"/>
             <p14:sldId id="259"/>
@@ -152,7 +152,7 @@
             <p14:sldId id="264"/>
           </p14:sldIdLst>
         </p14:section>
-        <p14:section name="CML" id="{5772d766-0f2b-b1c8-0e66-7daabd921024}">
+        <p14:section name="CML" id="{8924b5ed-83fd-e010-d073-0b6527b462d1}">
           <p14:sldIdLst>
             <p14:sldId id="265"/>
             <p14:sldId id="266"/>
@@ -163,7 +163,7 @@
             <p14:sldId id="271"/>
           </p14:sldIdLst>
         </p14:section>
-        <p14:section name="Questions" id="{efc3480a-483c-7f62-aeb4-24e990814b36}">
+        <p14:section name="Questions" id="{aa104328-4a47-0062-19b7-3c605e5e87b0}">
           <p14:sldIdLst>
             <p14:sldId id="272"/>
             <p14:sldId id="273"/>
@@ -173,7 +173,7 @@
             <p14:sldId id="277"/>
           </p14:sldIdLst>
         </p14:section>
-        <p14:section name="References" id="{cf630f7b-6222-0b72-2e0d-e0f86ffaa391}">
+        <p14:section name="References" id="{a34dbe9a-5cc0-03dd-188b-1e61608432b3}">
           <p14:sldIdLst>
             <p14:sldId id="278"/>
             <p14:sldId id="279"/>
@@ -181,7 +181,7 @@
             <p14:sldId id="281"/>
           </p14:sldIdLst>
         </p14:section>
-        <p14:section name="Backup" id="{91f2d1e7-9f28-f122-497b-8161bc7ec826}">
+        <p14:section name="Backup" id="{2e6d02c8-8078-5c84-c597-b6da646f411f}">
           <p14:sldIdLst>
             <p14:sldId id="282"/>
             <p14:sldId id="283"/>
